--- a/Week07-08/M3_slides/Lab4_2.pptx
+++ b/Week07-08/M3_slides/Lab4_2.pptx
@@ -205,7 +205,7 @@
           <a:p>
             <a:fld id="{A9407A57-47BC-45C1-B9EB-906F4463B0AB}" type="datetimeFigureOut">
               <a:rPr lang="en-AU" smtClean="0"/>
-              <a:t>6/09/2025</a:t>
+              <a:t>18/09/2025</a:t>
             </a:fld>
             <a:endParaRPr lang="en-AU"/>
           </a:p>
@@ -641,7 +641,7 @@
           <a:p>
             <a:fld id="{1205BC88-DBF0-4610-A802-A09E0A6ECD22}" type="datetimeFigureOut">
               <a:rPr lang="en-AU" smtClean="0"/>
-              <a:t>6/09/2025</a:t>
+              <a:t>18/09/2025</a:t>
             </a:fld>
             <a:endParaRPr lang="en-AU"/>
           </a:p>
@@ -869,7 +869,7 @@
           <a:p>
             <a:fld id="{1205BC88-DBF0-4610-A802-A09E0A6ECD22}" type="datetimeFigureOut">
               <a:rPr lang="en-AU" smtClean="0"/>
-              <a:t>6/09/2025</a:t>
+              <a:t>18/09/2025</a:t>
             </a:fld>
             <a:endParaRPr lang="en-AU"/>
           </a:p>
@@ -1049,7 +1049,7 @@
           <a:p>
             <a:fld id="{1205BC88-DBF0-4610-A802-A09E0A6ECD22}" type="datetimeFigureOut">
               <a:rPr lang="en-AU" smtClean="0"/>
-              <a:t>6/09/2025</a:t>
+              <a:t>18/09/2025</a:t>
             </a:fld>
             <a:endParaRPr lang="en-AU"/>
           </a:p>
@@ -1219,7 +1219,7 @@
           <a:p>
             <a:fld id="{1205BC88-DBF0-4610-A802-A09E0A6ECD22}" type="datetimeFigureOut">
               <a:rPr lang="en-AU" smtClean="0"/>
-              <a:t>6/09/2025</a:t>
+              <a:t>18/09/2025</a:t>
             </a:fld>
             <a:endParaRPr lang="en-AU"/>
           </a:p>
@@ -1473,7 +1473,7 @@
           <a:p>
             <a:fld id="{1205BC88-DBF0-4610-A802-A09E0A6ECD22}" type="datetimeFigureOut">
               <a:rPr lang="en-AU" smtClean="0"/>
-              <a:t>6/09/2025</a:t>
+              <a:t>18/09/2025</a:t>
             </a:fld>
             <a:endParaRPr lang="en-AU"/>
           </a:p>
@@ -1799,7 +1799,7 @@
           <a:p>
             <a:fld id="{1205BC88-DBF0-4610-A802-A09E0A6ECD22}" type="datetimeFigureOut">
               <a:rPr lang="en-AU" smtClean="0"/>
-              <a:t>6/09/2025</a:t>
+              <a:t>18/09/2025</a:t>
             </a:fld>
             <a:endParaRPr lang="en-AU"/>
           </a:p>
@@ -2250,7 +2250,7 @@
           <a:p>
             <a:fld id="{1205BC88-DBF0-4610-A802-A09E0A6ECD22}" type="datetimeFigureOut">
               <a:rPr lang="en-AU" smtClean="0"/>
-              <a:t>6/09/2025</a:t>
+              <a:t>18/09/2025</a:t>
             </a:fld>
             <a:endParaRPr lang="en-AU"/>
           </a:p>
@@ -2368,7 +2368,7 @@
           <a:p>
             <a:fld id="{1205BC88-DBF0-4610-A802-A09E0A6ECD22}" type="datetimeFigureOut">
               <a:rPr lang="en-AU" smtClean="0"/>
-              <a:t>6/09/2025</a:t>
+              <a:t>18/09/2025</a:t>
             </a:fld>
             <a:endParaRPr lang="en-AU"/>
           </a:p>
@@ -2463,7 +2463,7 @@
           <a:p>
             <a:fld id="{1205BC88-DBF0-4610-A802-A09E0A6ECD22}" type="datetimeFigureOut">
               <a:rPr lang="en-AU" smtClean="0"/>
-              <a:t>6/09/2025</a:t>
+              <a:t>18/09/2025</a:t>
             </a:fld>
             <a:endParaRPr lang="en-AU"/>
           </a:p>
@@ -2750,7 +2750,7 @@
           <a:p>
             <a:fld id="{1205BC88-DBF0-4610-A802-A09E0A6ECD22}" type="datetimeFigureOut">
               <a:rPr lang="en-AU" smtClean="0"/>
-              <a:t>6/09/2025</a:t>
+              <a:t>18/09/2025</a:t>
             </a:fld>
             <a:endParaRPr lang="en-AU"/>
           </a:p>
@@ -3072,7 +3072,7 @@
           <a:p>
             <a:fld id="{1205BC88-DBF0-4610-A802-A09E0A6ECD22}" type="datetimeFigureOut">
               <a:rPr lang="en-AU" smtClean="0"/>
-              <a:t>6/09/2025</a:t>
+              <a:t>18/09/2025</a:t>
             </a:fld>
             <a:endParaRPr lang="en-AU"/>
           </a:p>
@@ -3326,7 +3326,7 @@
           <a:p>
             <a:fld id="{1205BC88-DBF0-4610-A802-A09E0A6ECD22}" type="datetimeFigureOut">
               <a:rPr lang="en-AU" smtClean="0"/>
-              <a:t>6/09/2025</a:t>
+              <a:t>18/09/2025</a:t>
             </a:fld>
             <a:endParaRPr lang="en-AU"/>
           </a:p>
@@ -6746,7 +6746,15 @@
           <a:p>
             <a:r>
               <a:rPr lang="en-US" dirty="0"/>
-              <a:t>	To “pick up” a target you must stop the robot for 2 seconds (doesn’t need to be exact) whilst being 	within 0.25m of the target. Intention of picking up the fruit needs to be shown in the GUI or terminal.</a:t>
+              <a:t>	To “pick up” a target you must stop the robot for 2 seconds (doesn’t need to be exact) whilst being 	</a:t>
+            </a:r>
+            <a:r>
+              <a:rPr lang="en-US"/>
+              <a:t>within 0.3m </a:t>
+            </a:r>
+            <a:r>
+              <a:rPr lang="en-US" dirty="0"/>
+              <a:t>of the target. Intention of picking up the fruit needs to be shown in the GUI or terminal.</a:t>
             </a:r>
           </a:p>
           <a:p>
@@ -8090,7 +8098,7 @@
           <a:p>
             <a:r>
               <a:rPr lang="en-US" dirty="0"/>
-              <a:t>	Max 5 penalties allowed: third time a penalty happens that run is disqualified and gets 0pt </a:t>
+              <a:t>	Max 5 penalties allowed: Fifth time a penalty happens that run is stopped</a:t>
             </a:r>
           </a:p>
         </p:txBody>
@@ -8204,7 +8212,7 @@
           <a:p>
             <a:r>
               <a:rPr lang="en-US" dirty="0"/>
-              <a:t>No more than 4 penalties (collision) applied in a run and no more than 5 penalties allowed. After the 5</a:t>
+              <a:t>No more than 5 penalties (collision) applied in a run and no more than 5 penalties allowed. After the 5</a:t>
             </a:r>
             <a:r>
               <a:rPr lang="en-US" baseline="30000" dirty="0"/>
@@ -8221,25 +8229,13 @@
           <a:p>
             <a:r>
               <a:rPr lang="en-US" dirty="0"/>
-              <a:t>End condition to achieve a qualified run:</a:t>
+              <a:t>End condition to achieve a qualified run: Your robot attempts to navigate to (stop past within 0.5m radius) 3/4 targets in order (skips allowed) for lvl2/lvl3 and 5 targets in any order for lv4. (You will only get marks for targets navigated in order and if it is a qualified run or level 1) </a:t>
             </a:r>
           </a:p>
           <a:p>
             <a:r>
               <a:rPr lang="en-US" dirty="0"/>
-              <a:t>	Your robot attempts to navigate to (drive past within 0.5m radius) 3 targets in order (skips allowed)</a:t>
-            </a:r>
-          </a:p>
-          <a:p>
-            <a:r>
-              <a:rPr lang="en-US" dirty="0"/>
-              <a:t>	(You will only get marks for targets navigated in order and if it is a qualified run or level 1)</a:t>
-            </a:r>
-          </a:p>
-          <a:p>
-            <a:r>
-              <a:rPr lang="en-US" dirty="0"/>
-              <a:t>	You have to show a qualified Lv2/Lv3/Lv4 run to get marked by the Lv2/Lv3/Lv4 formula</a:t>
+              <a:t>You have to show a qualified Lv2/Lv3/Lv4 run to get marked by the Lv2/Lv3/Lv4 formula</a:t>
             </a:r>
           </a:p>
           <a:p>
@@ -8264,7 +8260,7 @@
             </a:r>
             <a:r>
               <a:rPr lang="en-US" dirty="0"/>
-              <a:t>within the 0.25m radius to count as successful navigation to that target</a:t>
+              <a:t>within the 0.3m radius to count as successful navigation to that target</a:t>
             </a:r>
           </a:p>
           <a:p>
@@ -8273,7 +8269,7 @@
           <a:p>
             <a:r>
               <a:rPr lang="en-US" dirty="0"/>
-              <a:t>If we don’t see appropriate implementation of navigation and path planning in your codes for the level you are attempting you’ll get 0pt for M4</a:t>
+              <a:t>If we don’t see appropriate implementation of navigation and path planning in your codes for the level you are attempting you’ll get 0pt for M3</a:t>
             </a:r>
           </a:p>
           <a:p>
